--- a/source-files/Oct-2026-bristol-mm-group.pptx
+++ b/source-files/Oct-2026-bristol-mm-group.pptx
@@ -19,6 +19,7 @@
     <p:sldId id="268" r:id="rId13"/>
     <p:sldId id="269" r:id="rId14"/>
     <p:sldId id="259" r:id="rId15"/>
+    <p:sldId id="270" r:id="rId16"/>
   </p:sldIdLst>
   <p:sldSz cx="12192000" cy="6858000"/>
   <p:notesSz cx="6858000" cy="9144000"/>
@@ -118,6 +119,18 @@
     </a:lvl9pPr>
   </p:defaultTextStyle>
 </p:presentation>
+</file>
+
+<file path=ppt/commentAuthors.xml><?xml version="1.0" encoding="utf-8"?>
+<p:cmAuthorLst xmlns:a="http://schemas.openxmlformats.org/drawingml/2006/main" xmlns:r="http://schemas.openxmlformats.org/officeDocument/2006/relationships" xmlns:p="http://schemas.openxmlformats.org/presentationml/2006/main">
+  <p:cmAuthor id="1" name="Junzhe Chen" initials="JC" lastIdx="3" clrIdx="0">
+    <p:extLst>
+      <p:ext uri="{19B8F6BF-5375-455C-9EA6-DF929625EA0E}">
+        <p15:presenceInfo xmlns:p15="http://schemas.microsoft.com/office/powerpoint/2012/main" userId="S::gm25424@bristol.ac.uk::d8736036-6b40-49a9-8d12-110451a661db" providerId="AD"/>
+      </p:ext>
+    </p:extLst>
+  </p:cmAuthor>
+</p:cmAuthorLst>
 </file>
 
 <file path=ppt/slideLayouts/slideLayout1.xml><?xml version="1.0" encoding="utf-8"?>
@@ -3454,7 +3467,7 @@
         </p:nvSpPr>
         <p:spPr>
           <a:xfrm>
-            <a:off x="1524000" y="5954233"/>
+            <a:off x="1524000" y="5954232"/>
             <a:ext cx="9144000" cy="827881"/>
           </a:xfrm>
         </p:spPr>
@@ -3477,6 +3490,237 @@
                 <a:latin typeface="Helvetica" pitchFamily="2" charset="0"/>
               </a:rPr>
               <a:t>20/Oct/2026, Bristol, UK</a:t>
+            </a:r>
+          </a:p>
+        </p:txBody>
+      </p:sp>
+      <p:pic>
+        <p:nvPicPr>
+          <p:cNvPr id="5" name="Picture 4">
+            <a:extLst>
+              <a:ext uri="{FF2B5EF4-FFF2-40B4-BE49-F238E27FC236}">
+                <a16:creationId xmlns:a16="http://schemas.microsoft.com/office/drawing/2014/main" id="{E2BDAD9B-DC57-967C-32B3-35DAB77C5EEF}"/>
+              </a:ext>
+            </a:extLst>
+          </p:cNvPr>
+          <p:cNvPicPr>
+            <a:picLocks noChangeAspect="1"/>
+          </p:cNvPicPr>
+          <p:nvPr/>
+        </p:nvPicPr>
+        <p:blipFill>
+          <a:blip r:embed="rId2"/>
+          <a:stretch>
+            <a:fillRect/>
+          </a:stretch>
+        </p:blipFill>
+        <p:spPr>
+          <a:xfrm>
+            <a:off x="10229273" y="4617116"/>
+            <a:ext cx="1744627" cy="1751057"/>
+          </a:xfrm>
+          <a:prstGeom prst="rect">
+            <a:avLst/>
+          </a:prstGeom>
+        </p:spPr>
+      </p:pic>
+      <p:sp>
+        <p:nvSpPr>
+          <p:cNvPr id="6" name="Subtitle 2">
+            <a:extLst>
+              <a:ext uri="{FF2B5EF4-FFF2-40B4-BE49-F238E27FC236}">
+                <a16:creationId xmlns:a16="http://schemas.microsoft.com/office/drawing/2014/main" id="{C3A4852F-6237-6B3E-A637-800CD9004D6B}"/>
+              </a:ext>
+            </a:extLst>
+          </p:cNvPr>
+          <p:cNvSpPr txBox="1">
+            <a:spLocks/>
+          </p:cNvSpPr>
+          <p:nvPr/>
+        </p:nvSpPr>
+        <p:spPr>
+          <a:xfrm>
+            <a:off x="10120222" y="6368173"/>
+            <a:ext cx="1962727" cy="827881"/>
+          </a:xfrm>
+          <a:prstGeom prst="rect">
+            <a:avLst/>
+          </a:prstGeom>
+        </p:spPr>
+        <p:txBody>
+          <a:bodyPr vert="horz" lIns="91440" tIns="45720" rIns="91440" bIns="45720" rtlCol="0">
+            <a:normAutofit/>
+          </a:bodyPr>
+          <a:lstStyle>
+            <a:lvl1pPr marL="0" indent="0" algn="ctr" defTabSz="914400" rtl="0" eaLnBrk="1" latinLnBrk="0" hangingPunct="1">
+              <a:lnSpc>
+                <a:spcPct val="90000"/>
+              </a:lnSpc>
+              <a:spcBef>
+                <a:spcPts val="1000"/>
+              </a:spcBef>
+              <a:buFont typeface="Arial" panose="020B0604020202020204" pitchFamily="34" charset="0"/>
+              <a:buNone/>
+              <a:defRPr sz="2400" kern="1200">
+                <a:solidFill>
+                  <a:schemeClr val="tx1"/>
+                </a:solidFill>
+                <a:latin typeface="+mn-lt"/>
+                <a:ea typeface="+mn-ea"/>
+                <a:cs typeface="+mn-cs"/>
+              </a:defRPr>
+            </a:lvl1pPr>
+            <a:lvl2pPr marL="457200" indent="0" algn="ctr" defTabSz="914400" rtl="0" eaLnBrk="1" latinLnBrk="0" hangingPunct="1">
+              <a:lnSpc>
+                <a:spcPct val="90000"/>
+              </a:lnSpc>
+              <a:spcBef>
+                <a:spcPts val="500"/>
+              </a:spcBef>
+              <a:buFont typeface="Arial" panose="020B0604020202020204" pitchFamily="34" charset="0"/>
+              <a:buNone/>
+              <a:defRPr sz="2000" kern="1200">
+                <a:solidFill>
+                  <a:schemeClr val="tx1"/>
+                </a:solidFill>
+                <a:latin typeface="+mn-lt"/>
+                <a:ea typeface="+mn-ea"/>
+                <a:cs typeface="+mn-cs"/>
+              </a:defRPr>
+            </a:lvl2pPr>
+            <a:lvl3pPr marL="914400" indent="0" algn="ctr" defTabSz="914400" rtl="0" eaLnBrk="1" latinLnBrk="0" hangingPunct="1">
+              <a:lnSpc>
+                <a:spcPct val="90000"/>
+              </a:lnSpc>
+              <a:spcBef>
+                <a:spcPts val="500"/>
+              </a:spcBef>
+              <a:buFont typeface="Arial" panose="020B0604020202020204" pitchFamily="34" charset="0"/>
+              <a:buNone/>
+              <a:defRPr sz="1800" kern="1200">
+                <a:solidFill>
+                  <a:schemeClr val="tx1"/>
+                </a:solidFill>
+                <a:latin typeface="+mn-lt"/>
+                <a:ea typeface="+mn-ea"/>
+                <a:cs typeface="+mn-cs"/>
+              </a:defRPr>
+            </a:lvl3pPr>
+            <a:lvl4pPr marL="1371600" indent="0" algn="ctr" defTabSz="914400" rtl="0" eaLnBrk="1" latinLnBrk="0" hangingPunct="1">
+              <a:lnSpc>
+                <a:spcPct val="90000"/>
+              </a:lnSpc>
+              <a:spcBef>
+                <a:spcPts val="500"/>
+              </a:spcBef>
+              <a:buFont typeface="Arial" panose="020B0604020202020204" pitchFamily="34" charset="0"/>
+              <a:buNone/>
+              <a:defRPr sz="1600" kern="1200">
+                <a:solidFill>
+                  <a:schemeClr val="tx1"/>
+                </a:solidFill>
+                <a:latin typeface="+mn-lt"/>
+                <a:ea typeface="+mn-ea"/>
+                <a:cs typeface="+mn-cs"/>
+              </a:defRPr>
+            </a:lvl4pPr>
+            <a:lvl5pPr marL="1828800" indent="0" algn="ctr" defTabSz="914400" rtl="0" eaLnBrk="1" latinLnBrk="0" hangingPunct="1">
+              <a:lnSpc>
+                <a:spcPct val="90000"/>
+              </a:lnSpc>
+              <a:spcBef>
+                <a:spcPts val="500"/>
+              </a:spcBef>
+              <a:buFont typeface="Arial" panose="020B0604020202020204" pitchFamily="34" charset="0"/>
+              <a:buNone/>
+              <a:defRPr sz="1600" kern="1200">
+                <a:solidFill>
+                  <a:schemeClr val="tx1"/>
+                </a:solidFill>
+                <a:latin typeface="+mn-lt"/>
+                <a:ea typeface="+mn-ea"/>
+                <a:cs typeface="+mn-cs"/>
+              </a:defRPr>
+            </a:lvl5pPr>
+            <a:lvl6pPr marL="2286000" indent="0" algn="ctr" defTabSz="914400" rtl="0" eaLnBrk="1" latinLnBrk="0" hangingPunct="1">
+              <a:lnSpc>
+                <a:spcPct val="90000"/>
+              </a:lnSpc>
+              <a:spcBef>
+                <a:spcPts val="500"/>
+              </a:spcBef>
+              <a:buFont typeface="Arial" panose="020B0604020202020204" pitchFamily="34" charset="0"/>
+              <a:buNone/>
+              <a:defRPr sz="1600" kern="1200">
+                <a:solidFill>
+                  <a:schemeClr val="tx1"/>
+                </a:solidFill>
+                <a:latin typeface="+mn-lt"/>
+                <a:ea typeface="+mn-ea"/>
+                <a:cs typeface="+mn-cs"/>
+              </a:defRPr>
+            </a:lvl6pPr>
+            <a:lvl7pPr marL="2743200" indent="0" algn="ctr" defTabSz="914400" rtl="0" eaLnBrk="1" latinLnBrk="0" hangingPunct="1">
+              <a:lnSpc>
+                <a:spcPct val="90000"/>
+              </a:lnSpc>
+              <a:spcBef>
+                <a:spcPts val="500"/>
+              </a:spcBef>
+              <a:buFont typeface="Arial" panose="020B0604020202020204" pitchFamily="34" charset="0"/>
+              <a:buNone/>
+              <a:defRPr sz="1600" kern="1200">
+                <a:solidFill>
+                  <a:schemeClr val="tx1"/>
+                </a:solidFill>
+                <a:latin typeface="+mn-lt"/>
+                <a:ea typeface="+mn-ea"/>
+                <a:cs typeface="+mn-cs"/>
+              </a:defRPr>
+            </a:lvl7pPr>
+            <a:lvl8pPr marL="3200400" indent="0" algn="ctr" defTabSz="914400" rtl="0" eaLnBrk="1" latinLnBrk="0" hangingPunct="1">
+              <a:lnSpc>
+                <a:spcPct val="90000"/>
+              </a:lnSpc>
+              <a:spcBef>
+                <a:spcPts val="500"/>
+              </a:spcBef>
+              <a:buFont typeface="Arial" panose="020B0604020202020204" pitchFamily="34" charset="0"/>
+              <a:buNone/>
+              <a:defRPr sz="1600" kern="1200">
+                <a:solidFill>
+                  <a:schemeClr val="tx1"/>
+                </a:solidFill>
+                <a:latin typeface="+mn-lt"/>
+                <a:ea typeface="+mn-ea"/>
+                <a:cs typeface="+mn-cs"/>
+              </a:defRPr>
+            </a:lvl8pPr>
+            <a:lvl9pPr marL="3657600" indent="0" algn="ctr" defTabSz="914400" rtl="0" eaLnBrk="1" latinLnBrk="0" hangingPunct="1">
+              <a:lnSpc>
+                <a:spcPct val="90000"/>
+              </a:lnSpc>
+              <a:spcBef>
+                <a:spcPts val="500"/>
+              </a:spcBef>
+              <a:buFont typeface="Arial" panose="020B0604020202020204" pitchFamily="34" charset="0"/>
+              <a:buNone/>
+              <a:defRPr sz="1600" kern="1200">
+                <a:solidFill>
+                  <a:schemeClr val="tx1"/>
+                </a:solidFill>
+                <a:latin typeface="+mn-lt"/>
+                <a:ea typeface="+mn-ea"/>
+                <a:cs typeface="+mn-cs"/>
+              </a:defRPr>
+            </a:lvl9pPr>
+          </a:lstStyle>
+          <a:p>
+            <a:r>
+              <a:rPr lang="en-US" dirty="0">
+                <a:latin typeface="Helvetica" pitchFamily="2" charset="0"/>
+              </a:rPr>
+              <a:t>Full paper</a:t>
             </a:r>
           </a:p>
         </p:txBody>
@@ -4060,6 +4304,767 @@
 </p:sld>
 </file>
 
+<file path=ppt/slides/slide15.xml><?xml version="1.0" encoding="utf-8"?>
+<p:sld xmlns:a="http://schemas.openxmlformats.org/drawingml/2006/main" xmlns:r="http://schemas.openxmlformats.org/officeDocument/2006/relationships" xmlns:p="http://schemas.openxmlformats.org/presentationml/2006/main">
+  <p:cSld>
+    <p:spTree>
+      <p:nvGrpSpPr>
+        <p:cNvPr id="1" name="">
+          <a:extLst>
+            <a:ext uri="{FF2B5EF4-FFF2-40B4-BE49-F238E27FC236}">
+              <a16:creationId xmlns:a16="http://schemas.microsoft.com/office/drawing/2014/main" id="{FF6E2015-78C6-7BCB-F706-D55C1F12D228}"/>
+            </a:ext>
+          </a:extLst>
+        </p:cNvPr>
+        <p:cNvGrpSpPr/>
+        <p:nvPr/>
+      </p:nvGrpSpPr>
+      <p:grpSpPr>
+        <a:xfrm>
+          <a:off x="0" y="0"/>
+          <a:ext cx="0" cy="0"/>
+          <a:chOff x="0" y="0"/>
+          <a:chExt cx="0" cy="0"/>
+        </a:xfrm>
+      </p:grpSpPr>
+      <p:sp>
+        <p:nvSpPr>
+          <p:cNvPr id="2" name="Title 1">
+            <a:extLst>
+              <a:ext uri="{FF2B5EF4-FFF2-40B4-BE49-F238E27FC236}">
+                <a16:creationId xmlns:a16="http://schemas.microsoft.com/office/drawing/2014/main" id="{1D244442-2B13-872A-234E-A2E4F7AAAE88}"/>
+              </a:ext>
+            </a:extLst>
+          </p:cNvPr>
+          <p:cNvSpPr>
+            <a:spLocks noGrp="1"/>
+          </p:cNvSpPr>
+          <p:nvPr>
+            <p:ph type="title"/>
+          </p:nvPr>
+        </p:nvSpPr>
+        <p:spPr/>
+        <p:txBody>
+          <a:bodyPr/>
+          <a:lstStyle/>
+          <a:p>
+            <a:r>
+              <a:rPr lang="en-US" dirty="0">
+                <a:latin typeface="Helvetica" pitchFamily="2" charset="0"/>
+              </a:rPr>
+              <a:t>Thank you!</a:t>
+            </a:r>
+          </a:p>
+        </p:txBody>
+      </p:sp>
+      <p:pic>
+        <p:nvPicPr>
+          <p:cNvPr id="7" name="Content Placeholder 6">
+            <a:extLst>
+              <a:ext uri="{FF2B5EF4-FFF2-40B4-BE49-F238E27FC236}">
+                <a16:creationId xmlns:a16="http://schemas.microsoft.com/office/drawing/2014/main" id="{81C457A8-644E-2314-0986-99BB5E4D77B2}"/>
+              </a:ext>
+            </a:extLst>
+          </p:cNvPr>
+          <p:cNvPicPr>
+            <a:picLocks noGrp="1" noChangeAspect="1"/>
+          </p:cNvPicPr>
+          <p:nvPr>
+            <p:ph idx="1"/>
+          </p:nvPr>
+        </p:nvPicPr>
+        <p:blipFill>
+          <a:blip r:embed="rId2"/>
+          <a:stretch>
+            <a:fillRect/>
+          </a:stretch>
+        </p:blipFill>
+        <p:spPr>
+          <a:xfrm>
+            <a:off x="6200817" y="4332851"/>
+            <a:ext cx="1748862" cy="1751057"/>
+          </a:xfrm>
+          <a:prstGeom prst="rect">
+            <a:avLst/>
+          </a:prstGeom>
+        </p:spPr>
+      </p:pic>
+      <p:sp>
+        <p:nvSpPr>
+          <p:cNvPr id="5" name="Subtitle 2">
+            <a:extLst>
+              <a:ext uri="{FF2B5EF4-FFF2-40B4-BE49-F238E27FC236}">
+                <a16:creationId xmlns:a16="http://schemas.microsoft.com/office/drawing/2014/main" id="{EF999587-AB22-7BDE-6CDA-4646ED392039}"/>
+              </a:ext>
+            </a:extLst>
+          </p:cNvPr>
+          <p:cNvSpPr txBox="1">
+            <a:spLocks/>
+          </p:cNvSpPr>
+          <p:nvPr/>
+        </p:nvSpPr>
+        <p:spPr>
+          <a:xfrm>
+            <a:off x="6096000" y="6137696"/>
+            <a:ext cx="1962727" cy="827881"/>
+          </a:xfrm>
+          <a:prstGeom prst="rect">
+            <a:avLst/>
+          </a:prstGeom>
+        </p:spPr>
+        <p:txBody>
+          <a:bodyPr vert="horz" lIns="91440" tIns="45720" rIns="91440" bIns="45720" rtlCol="0">
+            <a:normAutofit/>
+          </a:bodyPr>
+          <a:lstStyle>
+            <a:lvl1pPr marL="0" indent="0" algn="ctr" defTabSz="914400" rtl="0" eaLnBrk="1" latinLnBrk="0" hangingPunct="1">
+              <a:lnSpc>
+                <a:spcPct val="90000"/>
+              </a:lnSpc>
+              <a:spcBef>
+                <a:spcPts val="1000"/>
+              </a:spcBef>
+              <a:buFont typeface="Arial" panose="020B0604020202020204" pitchFamily="34" charset="0"/>
+              <a:buNone/>
+              <a:defRPr sz="2400" kern="1200">
+                <a:solidFill>
+                  <a:schemeClr val="tx1"/>
+                </a:solidFill>
+                <a:latin typeface="+mn-lt"/>
+                <a:ea typeface="+mn-ea"/>
+                <a:cs typeface="+mn-cs"/>
+              </a:defRPr>
+            </a:lvl1pPr>
+            <a:lvl2pPr marL="457200" indent="0" algn="ctr" defTabSz="914400" rtl="0" eaLnBrk="1" latinLnBrk="0" hangingPunct="1">
+              <a:lnSpc>
+                <a:spcPct val="90000"/>
+              </a:lnSpc>
+              <a:spcBef>
+                <a:spcPts val="500"/>
+              </a:spcBef>
+              <a:buFont typeface="Arial" panose="020B0604020202020204" pitchFamily="34" charset="0"/>
+              <a:buNone/>
+              <a:defRPr sz="2000" kern="1200">
+                <a:solidFill>
+                  <a:schemeClr val="tx1"/>
+                </a:solidFill>
+                <a:latin typeface="+mn-lt"/>
+                <a:ea typeface="+mn-ea"/>
+                <a:cs typeface="+mn-cs"/>
+              </a:defRPr>
+            </a:lvl2pPr>
+            <a:lvl3pPr marL="914400" indent="0" algn="ctr" defTabSz="914400" rtl="0" eaLnBrk="1" latinLnBrk="0" hangingPunct="1">
+              <a:lnSpc>
+                <a:spcPct val="90000"/>
+              </a:lnSpc>
+              <a:spcBef>
+                <a:spcPts val="500"/>
+              </a:spcBef>
+              <a:buFont typeface="Arial" panose="020B0604020202020204" pitchFamily="34" charset="0"/>
+              <a:buNone/>
+              <a:defRPr sz="1800" kern="1200">
+                <a:solidFill>
+                  <a:schemeClr val="tx1"/>
+                </a:solidFill>
+                <a:latin typeface="+mn-lt"/>
+                <a:ea typeface="+mn-ea"/>
+                <a:cs typeface="+mn-cs"/>
+              </a:defRPr>
+            </a:lvl3pPr>
+            <a:lvl4pPr marL="1371600" indent="0" algn="ctr" defTabSz="914400" rtl="0" eaLnBrk="1" latinLnBrk="0" hangingPunct="1">
+              <a:lnSpc>
+                <a:spcPct val="90000"/>
+              </a:lnSpc>
+              <a:spcBef>
+                <a:spcPts val="500"/>
+              </a:spcBef>
+              <a:buFont typeface="Arial" panose="020B0604020202020204" pitchFamily="34" charset="0"/>
+              <a:buNone/>
+              <a:defRPr sz="1600" kern="1200">
+                <a:solidFill>
+                  <a:schemeClr val="tx1"/>
+                </a:solidFill>
+                <a:latin typeface="+mn-lt"/>
+                <a:ea typeface="+mn-ea"/>
+                <a:cs typeface="+mn-cs"/>
+              </a:defRPr>
+            </a:lvl4pPr>
+            <a:lvl5pPr marL="1828800" indent="0" algn="ctr" defTabSz="914400" rtl="0" eaLnBrk="1" latinLnBrk="0" hangingPunct="1">
+              <a:lnSpc>
+                <a:spcPct val="90000"/>
+              </a:lnSpc>
+              <a:spcBef>
+                <a:spcPts val="500"/>
+              </a:spcBef>
+              <a:buFont typeface="Arial" panose="020B0604020202020204" pitchFamily="34" charset="0"/>
+              <a:buNone/>
+              <a:defRPr sz="1600" kern="1200">
+                <a:solidFill>
+                  <a:schemeClr val="tx1"/>
+                </a:solidFill>
+                <a:latin typeface="+mn-lt"/>
+                <a:ea typeface="+mn-ea"/>
+                <a:cs typeface="+mn-cs"/>
+              </a:defRPr>
+            </a:lvl5pPr>
+            <a:lvl6pPr marL="2286000" indent="0" algn="ctr" defTabSz="914400" rtl="0" eaLnBrk="1" latinLnBrk="0" hangingPunct="1">
+              <a:lnSpc>
+                <a:spcPct val="90000"/>
+              </a:lnSpc>
+              <a:spcBef>
+                <a:spcPts val="500"/>
+              </a:spcBef>
+              <a:buFont typeface="Arial" panose="020B0604020202020204" pitchFamily="34" charset="0"/>
+              <a:buNone/>
+              <a:defRPr sz="1600" kern="1200">
+                <a:solidFill>
+                  <a:schemeClr val="tx1"/>
+                </a:solidFill>
+                <a:latin typeface="+mn-lt"/>
+                <a:ea typeface="+mn-ea"/>
+                <a:cs typeface="+mn-cs"/>
+              </a:defRPr>
+            </a:lvl6pPr>
+            <a:lvl7pPr marL="2743200" indent="0" algn="ctr" defTabSz="914400" rtl="0" eaLnBrk="1" latinLnBrk="0" hangingPunct="1">
+              <a:lnSpc>
+                <a:spcPct val="90000"/>
+              </a:lnSpc>
+              <a:spcBef>
+                <a:spcPts val="500"/>
+              </a:spcBef>
+              <a:buFont typeface="Arial" panose="020B0604020202020204" pitchFamily="34" charset="0"/>
+              <a:buNone/>
+              <a:defRPr sz="1600" kern="1200">
+                <a:solidFill>
+                  <a:schemeClr val="tx1"/>
+                </a:solidFill>
+                <a:latin typeface="+mn-lt"/>
+                <a:ea typeface="+mn-ea"/>
+                <a:cs typeface="+mn-cs"/>
+              </a:defRPr>
+            </a:lvl7pPr>
+            <a:lvl8pPr marL="3200400" indent="0" algn="ctr" defTabSz="914400" rtl="0" eaLnBrk="1" latinLnBrk="0" hangingPunct="1">
+              <a:lnSpc>
+                <a:spcPct val="90000"/>
+              </a:lnSpc>
+              <a:spcBef>
+                <a:spcPts val="500"/>
+              </a:spcBef>
+              <a:buFont typeface="Arial" panose="020B0604020202020204" pitchFamily="34" charset="0"/>
+              <a:buNone/>
+              <a:defRPr sz="1600" kern="1200">
+                <a:solidFill>
+                  <a:schemeClr val="tx1"/>
+                </a:solidFill>
+                <a:latin typeface="+mn-lt"/>
+                <a:ea typeface="+mn-ea"/>
+                <a:cs typeface="+mn-cs"/>
+              </a:defRPr>
+            </a:lvl8pPr>
+            <a:lvl9pPr marL="3657600" indent="0" algn="ctr" defTabSz="914400" rtl="0" eaLnBrk="1" latinLnBrk="0" hangingPunct="1">
+              <a:lnSpc>
+                <a:spcPct val="90000"/>
+              </a:lnSpc>
+              <a:spcBef>
+                <a:spcPts val="500"/>
+              </a:spcBef>
+              <a:buFont typeface="Arial" panose="020B0604020202020204" pitchFamily="34" charset="0"/>
+              <a:buNone/>
+              <a:defRPr sz="1600" kern="1200">
+                <a:solidFill>
+                  <a:schemeClr val="tx1"/>
+                </a:solidFill>
+                <a:latin typeface="+mn-lt"/>
+                <a:ea typeface="+mn-ea"/>
+                <a:cs typeface="+mn-cs"/>
+              </a:defRPr>
+            </a:lvl9pPr>
+          </a:lstStyle>
+          <a:p>
+            <a:r>
+              <a:rPr lang="en-US" dirty="0">
+                <a:latin typeface="Helvetica" pitchFamily="2" charset="0"/>
+              </a:rPr>
+              <a:t>Presentation slides</a:t>
+            </a:r>
+          </a:p>
+        </p:txBody>
+      </p:sp>
+      <p:pic>
+        <p:nvPicPr>
+          <p:cNvPr id="9" name="Picture 8">
+            <a:extLst>
+              <a:ext uri="{FF2B5EF4-FFF2-40B4-BE49-F238E27FC236}">
+                <a16:creationId xmlns:a16="http://schemas.microsoft.com/office/drawing/2014/main" id="{888BCF6E-7F45-E289-3A48-80DACF2C9FD9}"/>
+              </a:ext>
+            </a:extLst>
+          </p:cNvPr>
+          <p:cNvPicPr>
+            <a:picLocks noChangeAspect="1"/>
+          </p:cNvPicPr>
+          <p:nvPr/>
+        </p:nvPicPr>
+        <p:blipFill>
+          <a:blip r:embed="rId3"/>
+          <a:stretch>
+            <a:fillRect/>
+          </a:stretch>
+        </p:blipFill>
+        <p:spPr>
+          <a:xfrm>
+            <a:off x="8137669" y="4332851"/>
+            <a:ext cx="1804845" cy="1804845"/>
+          </a:xfrm>
+          <a:prstGeom prst="rect">
+            <a:avLst/>
+          </a:prstGeom>
+        </p:spPr>
+      </p:pic>
+      <p:sp>
+        <p:nvSpPr>
+          <p:cNvPr id="10" name="Subtitle 2">
+            <a:extLst>
+              <a:ext uri="{FF2B5EF4-FFF2-40B4-BE49-F238E27FC236}">
+                <a16:creationId xmlns:a16="http://schemas.microsoft.com/office/drawing/2014/main" id="{68C65A0C-F385-4D37-C27F-4C35753A57E1}"/>
+              </a:ext>
+            </a:extLst>
+          </p:cNvPr>
+          <p:cNvSpPr txBox="1">
+            <a:spLocks/>
+          </p:cNvSpPr>
+          <p:nvPr/>
+        </p:nvSpPr>
+        <p:spPr>
+          <a:xfrm>
+            <a:off x="8058727" y="6316990"/>
+            <a:ext cx="1962727" cy="827881"/>
+          </a:xfrm>
+          <a:prstGeom prst="rect">
+            <a:avLst/>
+          </a:prstGeom>
+        </p:spPr>
+        <p:txBody>
+          <a:bodyPr vert="horz" lIns="91440" tIns="45720" rIns="91440" bIns="45720" rtlCol="0">
+            <a:normAutofit/>
+          </a:bodyPr>
+          <a:lstStyle>
+            <a:lvl1pPr marL="0" indent="0" algn="ctr" defTabSz="914400" rtl="0" eaLnBrk="1" latinLnBrk="0" hangingPunct="1">
+              <a:lnSpc>
+                <a:spcPct val="90000"/>
+              </a:lnSpc>
+              <a:spcBef>
+                <a:spcPts val="1000"/>
+              </a:spcBef>
+              <a:buFont typeface="Arial" panose="020B0604020202020204" pitchFamily="34" charset="0"/>
+              <a:buNone/>
+              <a:defRPr sz="2400" kern="1200">
+                <a:solidFill>
+                  <a:schemeClr val="tx1"/>
+                </a:solidFill>
+                <a:latin typeface="+mn-lt"/>
+                <a:ea typeface="+mn-ea"/>
+                <a:cs typeface="+mn-cs"/>
+              </a:defRPr>
+            </a:lvl1pPr>
+            <a:lvl2pPr marL="457200" indent="0" algn="ctr" defTabSz="914400" rtl="0" eaLnBrk="1" latinLnBrk="0" hangingPunct="1">
+              <a:lnSpc>
+                <a:spcPct val="90000"/>
+              </a:lnSpc>
+              <a:spcBef>
+                <a:spcPts val="500"/>
+              </a:spcBef>
+              <a:buFont typeface="Arial" panose="020B0604020202020204" pitchFamily="34" charset="0"/>
+              <a:buNone/>
+              <a:defRPr sz="2000" kern="1200">
+                <a:solidFill>
+                  <a:schemeClr val="tx1"/>
+                </a:solidFill>
+                <a:latin typeface="+mn-lt"/>
+                <a:ea typeface="+mn-ea"/>
+                <a:cs typeface="+mn-cs"/>
+              </a:defRPr>
+            </a:lvl2pPr>
+            <a:lvl3pPr marL="914400" indent="0" algn="ctr" defTabSz="914400" rtl="0" eaLnBrk="1" latinLnBrk="0" hangingPunct="1">
+              <a:lnSpc>
+                <a:spcPct val="90000"/>
+              </a:lnSpc>
+              <a:spcBef>
+                <a:spcPts val="500"/>
+              </a:spcBef>
+              <a:buFont typeface="Arial" panose="020B0604020202020204" pitchFamily="34" charset="0"/>
+              <a:buNone/>
+              <a:defRPr sz="1800" kern="1200">
+                <a:solidFill>
+                  <a:schemeClr val="tx1"/>
+                </a:solidFill>
+                <a:latin typeface="+mn-lt"/>
+                <a:ea typeface="+mn-ea"/>
+                <a:cs typeface="+mn-cs"/>
+              </a:defRPr>
+            </a:lvl3pPr>
+            <a:lvl4pPr marL="1371600" indent="0" algn="ctr" defTabSz="914400" rtl="0" eaLnBrk="1" latinLnBrk="0" hangingPunct="1">
+              <a:lnSpc>
+                <a:spcPct val="90000"/>
+              </a:lnSpc>
+              <a:spcBef>
+                <a:spcPts val="500"/>
+              </a:spcBef>
+              <a:buFont typeface="Arial" panose="020B0604020202020204" pitchFamily="34" charset="0"/>
+              <a:buNone/>
+              <a:defRPr sz="1600" kern="1200">
+                <a:solidFill>
+                  <a:schemeClr val="tx1"/>
+                </a:solidFill>
+                <a:latin typeface="+mn-lt"/>
+                <a:ea typeface="+mn-ea"/>
+                <a:cs typeface="+mn-cs"/>
+              </a:defRPr>
+            </a:lvl4pPr>
+            <a:lvl5pPr marL="1828800" indent="0" algn="ctr" defTabSz="914400" rtl="0" eaLnBrk="1" latinLnBrk="0" hangingPunct="1">
+              <a:lnSpc>
+                <a:spcPct val="90000"/>
+              </a:lnSpc>
+              <a:spcBef>
+                <a:spcPts val="500"/>
+              </a:spcBef>
+              <a:buFont typeface="Arial" panose="020B0604020202020204" pitchFamily="34" charset="0"/>
+              <a:buNone/>
+              <a:defRPr sz="1600" kern="1200">
+                <a:solidFill>
+                  <a:schemeClr val="tx1"/>
+                </a:solidFill>
+                <a:latin typeface="+mn-lt"/>
+                <a:ea typeface="+mn-ea"/>
+                <a:cs typeface="+mn-cs"/>
+              </a:defRPr>
+            </a:lvl5pPr>
+            <a:lvl6pPr marL="2286000" indent="0" algn="ctr" defTabSz="914400" rtl="0" eaLnBrk="1" latinLnBrk="0" hangingPunct="1">
+              <a:lnSpc>
+                <a:spcPct val="90000"/>
+              </a:lnSpc>
+              <a:spcBef>
+                <a:spcPts val="500"/>
+              </a:spcBef>
+              <a:buFont typeface="Arial" panose="020B0604020202020204" pitchFamily="34" charset="0"/>
+              <a:buNone/>
+              <a:defRPr sz="1600" kern="1200">
+                <a:solidFill>
+                  <a:schemeClr val="tx1"/>
+                </a:solidFill>
+                <a:latin typeface="+mn-lt"/>
+                <a:ea typeface="+mn-ea"/>
+                <a:cs typeface="+mn-cs"/>
+              </a:defRPr>
+            </a:lvl6pPr>
+            <a:lvl7pPr marL="2743200" indent="0" algn="ctr" defTabSz="914400" rtl="0" eaLnBrk="1" latinLnBrk="0" hangingPunct="1">
+              <a:lnSpc>
+                <a:spcPct val="90000"/>
+              </a:lnSpc>
+              <a:spcBef>
+                <a:spcPts val="500"/>
+              </a:spcBef>
+              <a:buFont typeface="Arial" panose="020B0604020202020204" pitchFamily="34" charset="0"/>
+              <a:buNone/>
+              <a:defRPr sz="1600" kern="1200">
+                <a:solidFill>
+                  <a:schemeClr val="tx1"/>
+                </a:solidFill>
+                <a:latin typeface="+mn-lt"/>
+                <a:ea typeface="+mn-ea"/>
+                <a:cs typeface="+mn-cs"/>
+              </a:defRPr>
+            </a:lvl7pPr>
+            <a:lvl8pPr marL="3200400" indent="0" algn="ctr" defTabSz="914400" rtl="0" eaLnBrk="1" latinLnBrk="0" hangingPunct="1">
+              <a:lnSpc>
+                <a:spcPct val="90000"/>
+              </a:lnSpc>
+              <a:spcBef>
+                <a:spcPts val="500"/>
+              </a:spcBef>
+              <a:buFont typeface="Arial" panose="020B0604020202020204" pitchFamily="34" charset="0"/>
+              <a:buNone/>
+              <a:defRPr sz="1600" kern="1200">
+                <a:solidFill>
+                  <a:schemeClr val="tx1"/>
+                </a:solidFill>
+                <a:latin typeface="+mn-lt"/>
+                <a:ea typeface="+mn-ea"/>
+                <a:cs typeface="+mn-cs"/>
+              </a:defRPr>
+            </a:lvl8pPr>
+            <a:lvl9pPr marL="3657600" indent="0" algn="ctr" defTabSz="914400" rtl="0" eaLnBrk="1" latinLnBrk="0" hangingPunct="1">
+              <a:lnSpc>
+                <a:spcPct val="90000"/>
+              </a:lnSpc>
+              <a:spcBef>
+                <a:spcPts val="500"/>
+              </a:spcBef>
+              <a:buFont typeface="Arial" panose="020B0604020202020204" pitchFamily="34" charset="0"/>
+              <a:buNone/>
+              <a:defRPr sz="1600" kern="1200">
+                <a:solidFill>
+                  <a:schemeClr val="tx1"/>
+                </a:solidFill>
+                <a:latin typeface="+mn-lt"/>
+                <a:ea typeface="+mn-ea"/>
+                <a:cs typeface="+mn-cs"/>
+              </a:defRPr>
+            </a:lvl9pPr>
+          </a:lstStyle>
+          <a:p>
+            <a:r>
+              <a:rPr lang="en-US" dirty="0">
+                <a:latin typeface="Helvetica" pitchFamily="2" charset="0"/>
+              </a:rPr>
+              <a:t>GitHub</a:t>
+            </a:r>
+          </a:p>
+        </p:txBody>
+      </p:sp>
+      <p:pic>
+        <p:nvPicPr>
+          <p:cNvPr id="12" name="Picture 11">
+            <a:extLst>
+              <a:ext uri="{FF2B5EF4-FFF2-40B4-BE49-F238E27FC236}">
+                <a16:creationId xmlns:a16="http://schemas.microsoft.com/office/drawing/2014/main" id="{8CFB0EAC-7831-776C-B359-ABBB0DF08407}"/>
+              </a:ext>
+            </a:extLst>
+          </p:cNvPr>
+          <p:cNvPicPr>
+            <a:picLocks noChangeAspect="1"/>
+          </p:cNvPicPr>
+          <p:nvPr/>
+        </p:nvPicPr>
+        <p:blipFill>
+          <a:blip r:embed="rId4"/>
+          <a:stretch>
+            <a:fillRect/>
+          </a:stretch>
+        </p:blipFill>
+        <p:spPr>
+          <a:xfrm>
+            <a:off x="10130504" y="4332851"/>
+            <a:ext cx="1804845" cy="1804845"/>
+          </a:xfrm>
+          <a:prstGeom prst="rect">
+            <a:avLst/>
+          </a:prstGeom>
+        </p:spPr>
+      </p:pic>
+      <p:sp>
+        <p:nvSpPr>
+          <p:cNvPr id="13" name="Subtitle 2">
+            <a:extLst>
+              <a:ext uri="{FF2B5EF4-FFF2-40B4-BE49-F238E27FC236}">
+                <a16:creationId xmlns:a16="http://schemas.microsoft.com/office/drawing/2014/main" id="{9533156D-9C67-4FE7-2907-26ED6140F93C}"/>
+              </a:ext>
+            </a:extLst>
+          </p:cNvPr>
+          <p:cNvSpPr txBox="1">
+            <a:spLocks/>
+          </p:cNvSpPr>
+          <p:nvPr/>
+        </p:nvSpPr>
+        <p:spPr>
+          <a:xfrm>
+            <a:off x="10051562" y="6316989"/>
+            <a:ext cx="1962727" cy="827881"/>
+          </a:xfrm>
+          <a:prstGeom prst="rect">
+            <a:avLst/>
+          </a:prstGeom>
+        </p:spPr>
+        <p:txBody>
+          <a:bodyPr vert="horz" lIns="91440" tIns="45720" rIns="91440" bIns="45720" rtlCol="0">
+            <a:normAutofit/>
+          </a:bodyPr>
+          <a:lstStyle>
+            <a:lvl1pPr marL="0" indent="0" algn="ctr" defTabSz="914400" rtl="0" eaLnBrk="1" latinLnBrk="0" hangingPunct="1">
+              <a:lnSpc>
+                <a:spcPct val="90000"/>
+              </a:lnSpc>
+              <a:spcBef>
+                <a:spcPts val="1000"/>
+              </a:spcBef>
+              <a:buFont typeface="Arial" panose="020B0604020202020204" pitchFamily="34" charset="0"/>
+              <a:buNone/>
+              <a:defRPr sz="2400" kern="1200">
+                <a:solidFill>
+                  <a:schemeClr val="tx1"/>
+                </a:solidFill>
+                <a:latin typeface="+mn-lt"/>
+                <a:ea typeface="+mn-ea"/>
+                <a:cs typeface="+mn-cs"/>
+              </a:defRPr>
+            </a:lvl1pPr>
+            <a:lvl2pPr marL="457200" indent="0" algn="ctr" defTabSz="914400" rtl="0" eaLnBrk="1" latinLnBrk="0" hangingPunct="1">
+              <a:lnSpc>
+                <a:spcPct val="90000"/>
+              </a:lnSpc>
+              <a:spcBef>
+                <a:spcPts val="500"/>
+              </a:spcBef>
+              <a:buFont typeface="Arial" panose="020B0604020202020204" pitchFamily="34" charset="0"/>
+              <a:buNone/>
+              <a:defRPr sz="2000" kern="1200">
+                <a:solidFill>
+                  <a:schemeClr val="tx1"/>
+                </a:solidFill>
+                <a:latin typeface="+mn-lt"/>
+                <a:ea typeface="+mn-ea"/>
+                <a:cs typeface="+mn-cs"/>
+              </a:defRPr>
+            </a:lvl2pPr>
+            <a:lvl3pPr marL="914400" indent="0" algn="ctr" defTabSz="914400" rtl="0" eaLnBrk="1" latinLnBrk="0" hangingPunct="1">
+              <a:lnSpc>
+                <a:spcPct val="90000"/>
+              </a:lnSpc>
+              <a:spcBef>
+                <a:spcPts val="500"/>
+              </a:spcBef>
+              <a:buFont typeface="Arial" panose="020B0604020202020204" pitchFamily="34" charset="0"/>
+              <a:buNone/>
+              <a:defRPr sz="1800" kern="1200">
+                <a:solidFill>
+                  <a:schemeClr val="tx1"/>
+                </a:solidFill>
+                <a:latin typeface="+mn-lt"/>
+                <a:ea typeface="+mn-ea"/>
+                <a:cs typeface="+mn-cs"/>
+              </a:defRPr>
+            </a:lvl3pPr>
+            <a:lvl4pPr marL="1371600" indent="0" algn="ctr" defTabSz="914400" rtl="0" eaLnBrk="1" latinLnBrk="0" hangingPunct="1">
+              <a:lnSpc>
+                <a:spcPct val="90000"/>
+              </a:lnSpc>
+              <a:spcBef>
+                <a:spcPts val="500"/>
+              </a:spcBef>
+              <a:buFont typeface="Arial" panose="020B0604020202020204" pitchFamily="34" charset="0"/>
+              <a:buNone/>
+              <a:defRPr sz="1600" kern="1200">
+                <a:solidFill>
+                  <a:schemeClr val="tx1"/>
+                </a:solidFill>
+                <a:latin typeface="+mn-lt"/>
+                <a:ea typeface="+mn-ea"/>
+                <a:cs typeface="+mn-cs"/>
+              </a:defRPr>
+            </a:lvl4pPr>
+            <a:lvl5pPr marL="1828800" indent="0" algn="ctr" defTabSz="914400" rtl="0" eaLnBrk="1" latinLnBrk="0" hangingPunct="1">
+              <a:lnSpc>
+                <a:spcPct val="90000"/>
+              </a:lnSpc>
+              <a:spcBef>
+                <a:spcPts val="500"/>
+              </a:spcBef>
+              <a:buFont typeface="Arial" panose="020B0604020202020204" pitchFamily="34" charset="0"/>
+              <a:buNone/>
+              <a:defRPr sz="1600" kern="1200">
+                <a:solidFill>
+                  <a:schemeClr val="tx1"/>
+                </a:solidFill>
+                <a:latin typeface="+mn-lt"/>
+                <a:ea typeface="+mn-ea"/>
+                <a:cs typeface="+mn-cs"/>
+              </a:defRPr>
+            </a:lvl5pPr>
+            <a:lvl6pPr marL="2286000" indent="0" algn="ctr" defTabSz="914400" rtl="0" eaLnBrk="1" latinLnBrk="0" hangingPunct="1">
+              <a:lnSpc>
+                <a:spcPct val="90000"/>
+              </a:lnSpc>
+              <a:spcBef>
+                <a:spcPts val="500"/>
+              </a:spcBef>
+              <a:buFont typeface="Arial" panose="020B0604020202020204" pitchFamily="34" charset="0"/>
+              <a:buNone/>
+              <a:defRPr sz="1600" kern="1200">
+                <a:solidFill>
+                  <a:schemeClr val="tx1"/>
+                </a:solidFill>
+                <a:latin typeface="+mn-lt"/>
+                <a:ea typeface="+mn-ea"/>
+                <a:cs typeface="+mn-cs"/>
+              </a:defRPr>
+            </a:lvl6pPr>
+            <a:lvl7pPr marL="2743200" indent="0" algn="ctr" defTabSz="914400" rtl="0" eaLnBrk="1" latinLnBrk="0" hangingPunct="1">
+              <a:lnSpc>
+                <a:spcPct val="90000"/>
+              </a:lnSpc>
+              <a:spcBef>
+                <a:spcPts val="500"/>
+              </a:spcBef>
+              <a:buFont typeface="Arial" panose="020B0604020202020204" pitchFamily="34" charset="0"/>
+              <a:buNone/>
+              <a:defRPr sz="1600" kern="1200">
+                <a:solidFill>
+                  <a:schemeClr val="tx1"/>
+                </a:solidFill>
+                <a:latin typeface="+mn-lt"/>
+                <a:ea typeface="+mn-ea"/>
+                <a:cs typeface="+mn-cs"/>
+              </a:defRPr>
+            </a:lvl7pPr>
+            <a:lvl8pPr marL="3200400" indent="0" algn="ctr" defTabSz="914400" rtl="0" eaLnBrk="1" latinLnBrk="0" hangingPunct="1">
+              <a:lnSpc>
+                <a:spcPct val="90000"/>
+              </a:lnSpc>
+              <a:spcBef>
+                <a:spcPts val="500"/>
+              </a:spcBef>
+              <a:buFont typeface="Arial" panose="020B0604020202020204" pitchFamily="34" charset="0"/>
+              <a:buNone/>
+              <a:defRPr sz="1600" kern="1200">
+                <a:solidFill>
+                  <a:schemeClr val="tx1"/>
+                </a:solidFill>
+                <a:latin typeface="+mn-lt"/>
+                <a:ea typeface="+mn-ea"/>
+                <a:cs typeface="+mn-cs"/>
+              </a:defRPr>
+            </a:lvl8pPr>
+            <a:lvl9pPr marL="3657600" indent="0" algn="ctr" defTabSz="914400" rtl="0" eaLnBrk="1" latinLnBrk="0" hangingPunct="1">
+              <a:lnSpc>
+                <a:spcPct val="90000"/>
+              </a:lnSpc>
+              <a:spcBef>
+                <a:spcPts val="500"/>
+              </a:spcBef>
+              <a:buFont typeface="Arial" panose="020B0604020202020204" pitchFamily="34" charset="0"/>
+              <a:buNone/>
+              <a:defRPr sz="1600" kern="1200">
+                <a:solidFill>
+                  <a:schemeClr val="tx1"/>
+                </a:solidFill>
+                <a:latin typeface="+mn-lt"/>
+                <a:ea typeface="+mn-ea"/>
+                <a:cs typeface="+mn-cs"/>
+              </a:defRPr>
+            </a:lvl9pPr>
+          </a:lstStyle>
+          <a:p>
+            <a:r>
+              <a:rPr lang="en-US" dirty="0">
+                <a:latin typeface="Helvetica" pitchFamily="2" charset="0"/>
+              </a:rPr>
+              <a:t>LinkedIn</a:t>
+            </a:r>
+          </a:p>
+        </p:txBody>
+      </p:sp>
+    </p:spTree>
+    <p:extLst>
+      <p:ext uri="{BB962C8B-B14F-4D97-AF65-F5344CB8AC3E}">
+        <p14:creationId xmlns:p14="http://schemas.microsoft.com/office/powerpoint/2010/main" val="1335809039"/>
+      </p:ext>
+    </p:extLst>
+  </p:cSld>
+  <p:clrMapOvr>
+    <a:masterClrMapping/>
+  </p:clrMapOvr>
+</p:sld>
+</file>
+
 <file path=ppt/slides/slide2.xml><?xml version="1.0" encoding="utf-8"?>
 <p:sld xmlns:a="http://schemas.openxmlformats.org/drawingml/2006/main" xmlns:r="http://schemas.openxmlformats.org/officeDocument/2006/relationships" xmlns:p="http://schemas.openxmlformats.org/presentationml/2006/main">
   <p:cSld>
@@ -4107,12 +5112,67 @@
           </a:p>
         </p:txBody>
       </p:sp>
+      <p:sp>
+        <p:nvSpPr>
+          <p:cNvPr id="7" name="TextBox 6">
+            <a:extLst>
+              <a:ext uri="{FF2B5EF4-FFF2-40B4-BE49-F238E27FC236}">
+                <a16:creationId xmlns:a16="http://schemas.microsoft.com/office/drawing/2014/main" id="{4BFC2B42-7D68-D946-6E17-F33D3D98F023}"/>
+              </a:ext>
+            </a:extLst>
+          </p:cNvPr>
+          <p:cNvSpPr txBox="1"/>
+          <p:nvPr/>
+        </p:nvSpPr>
+        <p:spPr>
+          <a:xfrm>
+            <a:off x="1618917" y="5882062"/>
+            <a:ext cx="9734883" cy="523220"/>
+          </a:xfrm>
+          <a:prstGeom prst="rect">
+            <a:avLst/>
+          </a:prstGeom>
+          <a:noFill/>
+        </p:spPr>
+        <p:txBody>
+          <a:bodyPr wrap="square" rtlCol="0">
+            <a:spAutoFit/>
+          </a:bodyPr>
+          <a:lstStyle/>
+          <a:p>
+            <a:r>
+              <a:rPr lang="en-US" sz="2800" dirty="0">
+                <a:latin typeface="Helvetica" pitchFamily="2" charset="0"/>
+              </a:rPr>
+              <a:t>Make memristor function </a:t>
+            </a:r>
+            <a:r>
+              <a:rPr lang="en-US" sz="2800" b="1" dirty="0">
+                <a:latin typeface="Helvetica" pitchFamily="2" charset="0"/>
+              </a:rPr>
+              <a:t>longer </a:t>
+            </a:r>
+            <a:r>
+              <a:rPr lang="en-US" sz="2800" dirty="0">
+                <a:latin typeface="Helvetica" pitchFamily="2" charset="0"/>
+              </a:rPr>
+              <a:t>&amp;</a:t>
+            </a:r>
+            <a:r>
+              <a:rPr lang="en-US" sz="2800" b="1" dirty="0">
+                <a:latin typeface="Helvetica" pitchFamily="2" charset="0"/>
+              </a:rPr>
+              <a:t> more robust</a:t>
+            </a:r>
+          </a:p>
+        </p:txBody>
+      </p:sp>
       <p:pic>
         <p:nvPicPr>
-          <p:cNvPr id="5" name="Content Placeholder 4">
-            <a:extLst>
-              <a:ext uri="{FF2B5EF4-FFF2-40B4-BE49-F238E27FC236}">
-                <a16:creationId xmlns:a16="http://schemas.microsoft.com/office/drawing/2014/main" id="{31254A62-8D06-114A-638E-5A0E0C8C75F8}"/>
+          <p:cNvPr id="11" name="Content Placeholder 10">
+            <a:extLst>
+              <a:ext uri="{FF2B5EF4-FFF2-40B4-BE49-F238E27FC236}">
+                <a16:creationId xmlns:a16="http://schemas.microsoft.com/office/drawing/2014/main" id="{56988A2B-8CCA-A572-B279-BBD2CC021175}"/>
               </a:ext>
             </a:extLst>
           </p:cNvPr>
@@ -4125,21 +5185,73 @@
         </p:nvPicPr>
         <p:blipFill>
           <a:blip r:embed="rId2"/>
-          <a:srcRect b="60371"/>
+          <a:srcRect l="21500" r="1811"/>
           <a:stretch>
             <a:fillRect/>
           </a:stretch>
         </p:blipFill>
         <p:spPr>
           <a:xfrm>
-            <a:off x="378587" y="1909799"/>
-            <a:ext cx="11434826" cy="3753152"/>
+            <a:off x="1308847" y="1445953"/>
+            <a:ext cx="9574305" cy="3966094"/>
           </a:xfrm>
           <a:prstGeom prst="rect">
             <a:avLst/>
           </a:prstGeom>
         </p:spPr>
       </p:pic>
+      <p:sp>
+        <p:nvSpPr>
+          <p:cNvPr id="6" name="Rectangle 5">
+            <a:extLst>
+              <a:ext uri="{FF2B5EF4-FFF2-40B4-BE49-F238E27FC236}">
+                <a16:creationId xmlns:a16="http://schemas.microsoft.com/office/drawing/2014/main" id="{1CDEE754-EEA1-F22F-7B4E-F2AA0EB9178D}"/>
+              </a:ext>
+            </a:extLst>
+          </p:cNvPr>
+          <p:cNvSpPr/>
+          <p:nvPr/>
+        </p:nvSpPr>
+        <p:spPr>
+          <a:xfrm>
+            <a:off x="838199" y="2005666"/>
+            <a:ext cx="701317" cy="497542"/>
+          </a:xfrm>
+          <a:prstGeom prst="rect">
+            <a:avLst/>
+          </a:prstGeom>
+          <a:solidFill>
+            <a:schemeClr val="bg1"/>
+          </a:solidFill>
+          <a:ln>
+            <a:noFill/>
+          </a:ln>
+        </p:spPr>
+        <p:style>
+          <a:lnRef idx="2">
+            <a:schemeClr val="accent1">
+              <a:shade val="15000"/>
+            </a:schemeClr>
+          </a:lnRef>
+          <a:fillRef idx="1">
+            <a:schemeClr val="accent1"/>
+          </a:fillRef>
+          <a:effectRef idx="0">
+            <a:schemeClr val="accent1"/>
+          </a:effectRef>
+          <a:fontRef idx="minor">
+            <a:schemeClr val="lt1"/>
+          </a:fontRef>
+        </p:style>
+        <p:txBody>
+          <a:bodyPr rtlCol="0" anchor="ctr"/>
+          <a:lstStyle/>
+          <a:p>
+            <a:pPr algn="ctr"/>
+            <a:endParaRPr lang="en-US"/>
+          </a:p>
+        </p:txBody>
+      </p:sp>
     </p:spTree>
     <p:extLst>
       <p:ext uri="{BB962C8B-B14F-4D97-AF65-F5344CB8AC3E}">
@@ -4438,7 +5550,13 @@
               <a:rPr lang="en-US" sz="2800" dirty="0">
                 <a:latin typeface="Helvetica" pitchFamily="2" charset="0"/>
               </a:rPr>
-              <a:t>Accuracy limited by CLK speed</a:t>
+              <a:t>Accuracy limited by </a:t>
+            </a:r>
+            <a:r>
+              <a:rPr lang="en-US" sz="2800" b="1" dirty="0">
+                <a:latin typeface="Helvetica" pitchFamily="2" charset="0"/>
+              </a:rPr>
+              <a:t>CLK period</a:t>
             </a:r>
           </a:p>
         </p:txBody>
@@ -4457,7 +5575,7 @@
         </p:nvCxnSpPr>
         <p:spPr>
           <a:xfrm>
-            <a:off x="9915277" y="2615609"/>
+            <a:off x="9139423" y="2615609"/>
             <a:ext cx="0" cy="1169582"/>
           </a:xfrm>
           <a:prstGeom prst="straightConnector1">
@@ -4497,7 +5615,7 @@
         </p:nvSpPr>
         <p:spPr>
           <a:xfrm>
-            <a:off x="8293603" y="5107033"/>
+            <a:off x="7997782" y="5107033"/>
             <a:ext cx="2501152" cy="954107"/>
           </a:xfrm>
           <a:prstGeom prst="rect">
@@ -4512,10 +5630,16 @@
           <a:lstStyle/>
           <a:p>
             <a:r>
+              <a:rPr lang="en-US" sz="2800" b="1" dirty="0">
+                <a:latin typeface="Helvetica" pitchFamily="2" charset="0"/>
+              </a:rPr>
+              <a:t>Pulse</a:t>
+            </a:r>
+            <a:r>
               <a:rPr lang="en-US" sz="2800" dirty="0">
                 <a:latin typeface="Helvetica" pitchFamily="2" charset="0"/>
               </a:rPr>
-              <a:t>Pulse instead of CLK</a:t>
+              <a:t> instead of CLK</a:t>
             </a:r>
           </a:p>
         </p:txBody>
@@ -4692,10 +5816,10 @@
       </p:sp>
       <p:pic>
         <p:nvPicPr>
-          <p:cNvPr id="7" name="Content Placeholder 6">
-            <a:extLst>
-              <a:ext uri="{FF2B5EF4-FFF2-40B4-BE49-F238E27FC236}">
-                <a16:creationId xmlns:a16="http://schemas.microsoft.com/office/drawing/2014/main" id="{2CE6E869-C0EC-0A19-E995-C5C5195B43C6}"/>
+          <p:cNvPr id="11" name="Content Placeholder 10">
+            <a:extLst>
+              <a:ext uri="{FF2B5EF4-FFF2-40B4-BE49-F238E27FC236}">
+                <a16:creationId xmlns:a16="http://schemas.microsoft.com/office/drawing/2014/main" id="{3A86FDF0-0742-8C60-8F01-73A8EDC1B1EF}"/>
               </a:ext>
             </a:extLst>
           </p:cNvPr>
@@ -4714,8 +5838,8 @@
         </p:blipFill>
         <p:spPr>
           <a:xfrm>
-            <a:off x="2315938" y="1547520"/>
-            <a:ext cx="7560123" cy="5162562"/>
+            <a:off x="2392415" y="1452282"/>
+            <a:ext cx="7407169" cy="5040593"/>
           </a:xfrm>
           <a:prstGeom prst="rect">
             <a:avLst/>
@@ -4910,7 +6034,7 @@
         </p:blipFill>
         <p:spPr>
           <a:xfrm>
-            <a:off x="838200" y="2266676"/>
+            <a:off x="838200" y="1863264"/>
             <a:ext cx="10515600" cy="3469235"/>
           </a:xfrm>
           <a:prstGeom prst="rect">
@@ -4918,6 +6042,55 @@
           </a:prstGeom>
         </p:spPr>
       </p:pic>
+      <p:sp>
+        <p:nvSpPr>
+          <p:cNvPr id="8" name="TextBox 7">
+            <a:extLst>
+              <a:ext uri="{FF2B5EF4-FFF2-40B4-BE49-F238E27FC236}">
+                <a16:creationId xmlns:a16="http://schemas.microsoft.com/office/drawing/2014/main" id="{8F727D9F-A096-9640-747C-3F0034121047}"/>
+              </a:ext>
+            </a:extLst>
+          </p:cNvPr>
+          <p:cNvSpPr txBox="1"/>
+          <p:nvPr/>
+        </p:nvSpPr>
+        <p:spPr>
+          <a:xfrm>
+            <a:off x="1032205" y="5538768"/>
+            <a:ext cx="3580136" cy="954107"/>
+          </a:xfrm>
+          <a:prstGeom prst="rect">
+            <a:avLst/>
+          </a:prstGeom>
+          <a:noFill/>
+        </p:spPr>
+        <p:txBody>
+          <a:bodyPr wrap="square" rtlCol="0">
+            <a:spAutoFit/>
+          </a:bodyPr>
+          <a:lstStyle/>
+          <a:p>
+            <a:r>
+              <a:rPr lang="en-US" sz="2800" b="1" dirty="0">
+                <a:latin typeface="Helvetica" pitchFamily="2" charset="0"/>
+              </a:rPr>
+              <a:t>Current-starve</a:t>
+            </a:r>
+            <a:r>
+              <a:rPr lang="en-US" sz="2800" dirty="0">
+                <a:latin typeface="Helvetica" pitchFamily="2" charset="0"/>
+              </a:rPr>
+              <a:t> with </a:t>
+            </a:r>
+            <a:r>
+              <a:rPr lang="en-US" sz="2800" b="1" dirty="0">
+                <a:latin typeface="Helvetica" pitchFamily="2" charset="0"/>
+              </a:rPr>
+              <a:t>timing capacitor</a:t>
+            </a:r>
+          </a:p>
+        </p:txBody>
+      </p:sp>
     </p:spTree>
     <p:extLst>
       <p:ext uri="{BB962C8B-B14F-4D97-AF65-F5344CB8AC3E}">
@@ -5008,8 +6181,8 @@
         </p:blipFill>
         <p:spPr>
           <a:xfrm>
-            <a:off x="1926781" y="1825625"/>
-            <a:ext cx="8338438" cy="4351338"/>
+            <a:off x="1340190" y="1519518"/>
+            <a:ext cx="9511620" cy="4963552"/>
           </a:xfrm>
           <a:prstGeom prst="rect">
             <a:avLst/>
